--- a/dist/초4/과학/생물과기체/초4_과학_생물과기체_02_기체의성질.pptx
+++ b/dist/초4/과학/생물과기체/초4_과학_생물과기체_02_기체의성질.pptx
@@ -124,13 +124,13 @@
   <p:extLst>
     <p:ext uri="{521415D9-36F7-43E2-AB2F-B90AF26B5E84}">
       <p14:sectionLst xmlns:p14="http://schemas.microsoft.com/office/powerpoint/2010/main">
-        <p14:section name="도입" id="{039a4131-d279-04ac-bdd7-6e6566b536b1}">
+        <p14:section name="도입" id="{4941db5a-dca1-bc62-6625-bdd067bbe59b}">
           <p14:sldIdLst>
             <p14:sldId id="256"/>
             <p14:sldId id="257"/>
           </p14:sldIdLst>
         </p14:section>
-        <p14:section name="연습" id="{059e4d4c-0e81-f0a9-afda-eef04dc9b423}">
+        <p14:section name="연습" id="{90d9e29b-46a1-6fb7-d89e-146ca4c39c15}">
           <p14:sldIdLst>
             <p14:sldId id="258"/>
             <p14:sldId id="259"/>
@@ -143,34 +143,34 @@
             <p14:sldId id="268"/>
           </p14:sldIdLst>
         </p14:section>
-        <p14:section name="개념" id="{2f00b337-e0b6-1b61-aa5e-50f68f20af15}">
+        <p14:section name="개념" id="{46e4581d-66ff-f81f-e0b4-1c951a2bd188}">
           <p14:sldIdLst>
             <p14:sldId id="261"/>
             <p14:sldId id="267"/>
           </p14:sldIdLst>
         </p14:section>
-        <p14:section name="연습" id="{aa82e69c-c8ee-abd3-3a84-4b7abb9a543d}">
+        <p14:section name="연습" id="{2039b682-9e01-273f-da25-bf41e15a9733}">
           <p14:sldIdLst/>
         </p14:section>
-        <p14:section name="개념" id="{389e44ee-3ce1-60c1-cec1-e58da9f21b25}">
+        <p14:section name="개념" id="{a3d2ff9c-5ea8-ec03-801a-b63facaa7a0e}">
           <p14:sldIdLst/>
         </p14:section>
-        <p14:section name="연습" id="{02d742d0-3136-14f4-4860-1997c65aa252}">
+        <p14:section name="연습" id="{b3b0ad32-9b79-bd4b-f36c-cef8e3fd067e}">
           <p14:sldIdLst/>
         </p14:section>
-        <p14:section name="확인" id="{099143f1-09d1-fba5-ba9c-5fc3a48d82f3}">
+        <p14:section name="확인" id="{ad53f7e8-1a50-9f60-de88-ef40f6d79367}">
           <p14:sldIdLst>
             <p14:sldId id="269"/>
             <p14:sldId id="270"/>
             <p14:sldId id="271"/>
           </p14:sldIdLst>
         </p14:section>
-        <p14:section name="정리" id="{3c7f7aa9-b0cc-4cea-0edc-bea2b2503c36}">
+        <p14:section name="정리" id="{55366f2f-326e-1baf-5a4f-3a8bc9afd0fd}">
           <p14:sldIdLst>
             <p14:sldId id="272"/>
           </p14:sldIdLst>
         </p14:section>
-        <p14:section name="보충" id="{a2621817-84cc-3c3b-ed75-1112aecc7f47}">
+        <p14:section name="보충" id="{db5ecd88-b552-25d7-4097-a5234d1c794e}">
           <p14:sldIdLst>
             <p14:sldId id="273"/>
           </p14:sldIdLst>
